--- a/src/Pintura.Tests/fixtures/pptx/default-theme.pptx
+++ b/src/Pintura.Tests/fixtures/pptx/default-theme.pptx
@@ -5,12 +5,12 @@
     <p:sldMasterId id="2147483648" r:id="rId1"/>
   </p:sldMasterIdLst>
   <p:sldIdLst>
-    <p:sldId id="257" r:id="Rafe5a3f921ad4dcf"/>
-    <p:sldId id="258" r:id="R6ec56dc692e2471e"/>
-    <p:sldId id="259" r:id="R689b1d223e0548e1"/>
-    <p:sldId id="260" r:id="R46a2388da20848a8"/>
-    <p:sldId id="261" r:id="R93aa61b366dc4e67"/>
-    <p:sldId id="262" r:id="R32a2b54919694d72"/>
+    <p:sldId id="257" r:id="Rede929e31373429e"/>
+    <p:sldId id="258" r:id="R7609ee0fda3543b9"/>
+    <p:sldId id="259" r:id="R9b03bb61f13d4eca"/>
+    <p:sldId id="260" r:id="Rff1f3bd5091a4faa"/>
+    <p:sldId id="261" r:id="R4fcec321fc4d4473"/>
+    <p:sldId id="262" r:id="Rc47144963c8f4b55"/>
   </p:sldIdLst>
   <p:sldSz cx="12192000" cy="6858000"/>
   <p:notesSz cx="6858000" cy="9144000"/>
@@ -109,145 +109,34 @@
       </a:defRPr>
     </a:lvl9pPr>
   </p:defaultTextStyle>
+  <p:extLst>
+    <p:ext uri="{521415D9-36F7-43E2-AB2F-B90AF26B5E84}">
+      <p14:sectionLst xmlns:p14="http://schemas.microsoft.com/office/powerpoint/2010/main">
+        <p14:section name="Default Section" id="{1FF75EB3-ABB8-4CD1-8A32-0256EBB70A98}">
+          <p14:sldIdLst>
+            <p14:sldId id="257"/>
+          </p14:sldIdLst>
+        </p14:section>
+        <p14:section name="Full-year results" id="{0A83E073-CFC9-44CC-9410-B8AED0B1D8BD}">
+          <p14:sldIdLst>
+            <p14:sldId id="258"/>
+            <p14:sldId id="259"/>
+            <p14:sldId id="260"/>
+            <p14:sldId id="261"/>
+          </p14:sldIdLst>
+        </p14:section>
+        <p14:section name="First half of 2026" id="{C9E2DDCA-2852-425A-91A5-4E3F79BA8FA0}">
+          <p14:sldIdLst>
+            <p14:sldId id="262"/>
+          </p14:sldIdLst>
+        </p14:section>
+      </p14:sectionLst>
+    </p:ext>
+  </p:extLst>
 </p:presentation>
 </file>
 
 <file path=ppt/slideLayouts/slideLayout2.xml><?xml version="1.0" encoding="utf-8"?>
-<p:sldLayout xmlns:a="http://schemas.openxmlformats.org/drawingml/2006/main" xmlns:p="http://schemas.openxmlformats.org/presentationml/2006/main" preserve="1">
-  <p:cSld name="Blank">
-    <p:spTree>
-      <p:nvGrpSpPr>
-        <p:cNvPr id="1" name=""/>
-        <p:cNvGrpSpPr/>
-        <p:nvPr/>
-      </p:nvGrpSpPr>
-      <p:grpSpPr>
-        <a:xfrm xmlns:a="http://schemas.openxmlformats.org/drawingml/2006/main"/>
-      </p:grpSpPr>
-      <p:sp>
-        <p:nvSpPr>
-          <p:cNvPr id="2" name="TextBox 2"/>
-          <p:cNvSpPr>
-            <a:spLocks/>
-          </p:cNvSpPr>
-          <p:nvPr>
-            <p:ph type="sldNum" idx="12"/>
-          </p:nvPr>
-        </p:nvSpPr>
-        <p:spPr>
-          <a:xfrm>
-            <a:off x="10922000" y="6451600"/>
-            <a:ext cx="762000" cy="279400"/>
-          </a:xfrm>
-          <a:prstGeom prst="rect">
-            <a:avLst/>
-          </a:prstGeom>
-        </p:spPr>
-        <p:txBody>
-          <a:bodyPr wrap="square" lIns="91440" tIns="45720" rIns="91440" bIns="45720" anchor="t">
-            <a:noAutofit/>
-          </a:bodyPr>
-          <a:lstStyle>
-            <a:lvl1pPr algn="r">
-              <a:lnSpc>
-                <a:spcPct val="100000"/>
-              </a:lnSpc>
-              <a:spcBef>
-                <a:spcPts val="0"/>
-              </a:spcBef>
-              <a:spcAft>
-                <a:spcPts val="0"/>
-              </a:spcAft>
-              <a:buNone/>
-              <a:defRPr sz="1100" b="0" i="0" u="none">
-                <a:solidFill>
-                  <a:schemeClr val="dk1">
-                    <a:lumMod val="50000"/>
-                    <a:lumOff val="50000"/>
-                  </a:schemeClr>
-                </a:solidFill>
-                <a:latin typeface="+mn-lt"/>
-              </a:defRPr>
-            </a:lvl1pPr>
-          </a:lstStyle>
-          <a:p>
-            <a:fld id="{6F39D44F-EBDA-47F5-BBF9-B742C958319B}" type="slidenum">
-              <a:rPr lang="en-US"/>
-              <a:t>‹#›</a:t>
-            </a:fld>
-            <a:endParaRPr lang="en-US"/>
-          </a:p>
-        </p:txBody>
-      </p:sp>
-      <p:sp>
-        <p:nvSpPr>
-          <p:cNvPr id="3" name="TextBox 3"/>
-          <p:cNvSpPr>
-            <a:spLocks/>
-          </p:cNvSpPr>
-          <p:nvPr/>
-        </p:nvSpPr>
-        <p:spPr>
-          <a:xfrm>
-            <a:off x="508000" y="6451600"/>
-            <a:ext cx="7620000" cy="279400"/>
-          </a:xfrm>
-          <a:prstGeom prst="rect">
-            <a:avLst/>
-          </a:prstGeom>
-        </p:spPr>
-        <p:txBody>
-          <a:bodyPr wrap="square" lIns="91440" tIns="45720" rIns="91440" bIns="45720" anchor="t">
-            <a:noAutofit/>
-          </a:bodyPr>
-          <a:lstStyle/>
-          <a:p>
-            <a:pPr marL="0" indent="0" algn="l">
-              <a:lnSpc>
-                <a:spcPct val="100000"/>
-              </a:lnSpc>
-              <a:spcBef>
-                <a:spcPts val="0"/>
-              </a:spcBef>
-              <a:spcAft>
-                <a:spcPts val="0"/>
-              </a:spcAft>
-              <a:buNone/>
-            </a:pPr>
-            <a:r>
-              <a:rPr sz="1100" b="0" i="0" u="none">
-                <a:solidFill>
-                  <a:schemeClr val="dk1">
-                    <a:lumMod val="50000"/>
-                    <a:lumOff val="50000"/>
-                  </a:schemeClr>
-                </a:solidFill>
-                <a:latin typeface="+mn-lt"/>
-              </a:rPr>
-              <a:t>Confidential. Prepared for board discussion.</a:t>
-            </a:r>
-            <a:endParaRPr sz="1100" b="0" i="0" u="none">
-              <a:solidFill>
-                <a:schemeClr val="dk1">
-                  <a:lumMod val="50000"/>
-                  <a:lumOff val="50000"/>
-                </a:schemeClr>
-              </a:solidFill>
-              <a:latin typeface="+mn-lt"/>
-            </a:endParaRPr>
-          </a:p>
-        </p:txBody>
-      </p:sp>
-    </p:spTree>
-  </p:cSld>
-  <p:clrMapOvr>
-    <a:masterClrMapping xmlns:a="http://schemas.openxmlformats.org/drawingml/2006/main"/>
-  </p:clrMapOvr>
-  <p:hf hdr="0"/>
-</p:sldLayout>
-</file>
-
-<file path=ppt/slideLayouts/slideLayout3.xml><?xml version="1.0" encoding="utf-8"?>
 <p:sldLayout xmlns:a="http://schemas.openxmlformats.org/drawingml/2006/main" xmlns:p="http://schemas.openxmlformats.org/presentationml/2006/main" preserve="1">
   <p:cSld name="Content">
     <p:spTree>
@@ -343,7 +232,7 @@
             </a:lvl1pPr>
           </a:lstStyle>
           <a:p>
-            <a:fld id="{381B24F7-CF79-45E1-8CC1-FFD784B7BA5D}" type="slidenum">
+            <a:fld id="{AC5A1E1C-B78F-4B5E-98DD-80D6E7CE0055}" type="slidenum">
               <a:rPr lang="en-US"/>
               <a:t>‹#›</a:t>
             </a:fld>
@@ -419,7 +308,7 @@
 </p:sldLayout>
 </file>
 
-<file path=ppt/slideLayouts/slideLayout4.xml><?xml version="1.0" encoding="utf-8"?>
+<file path=ppt/slideLayouts/slideLayout3.xml><?xml version="1.0" encoding="utf-8"?>
 <p:sldLayout xmlns:a="http://schemas.openxmlformats.org/drawingml/2006/main" xmlns:p="http://schemas.openxmlformats.org/presentationml/2006/main" preserve="1">
   <p:cSld name="Section">
     <p:spTree>
@@ -559,7 +448,7 @@
             </a:lvl1pPr>
           </a:lstStyle>
           <a:p>
-            <a:fld id="{45A8F0E6-0376-44F2-84A7-442079B99F60}" type="slidenum">
+            <a:fld id="{C20A36E9-3485-421E-9543-C97008690941}" type="slidenum">
               <a:rPr lang="en-US"/>
               <a:t>‹#›</a:t>
             </a:fld>
@@ -635,7 +524,7 @@
 </p:sldLayout>
 </file>
 
-<file path=ppt/slideLayouts/slideLayout5.xml><?xml version="1.0" encoding="utf-8"?>
+<file path=ppt/slideLayouts/slideLayout4.xml><?xml version="1.0" encoding="utf-8"?>
 <p:sldLayout xmlns:a="http://schemas.openxmlformats.org/drawingml/2006/main" xmlns:p="http://schemas.openxmlformats.org/presentationml/2006/main" preserve="1">
   <p:cSld name="Title">
     <p:spTree>
@@ -738,7 +627,7 @@
 
 <file path=ppt/slideMasters/slideMaster1.xml><?xml version="1.0" encoding="utf-8"?>
 <p:sldMaster xmlns:a16="http://schemas.microsoft.com/office/drawing/2014/main" xmlns:p14="http://schemas.microsoft.com/office/powerpoint/2010/main" xmlns:a="http://schemas.openxmlformats.org/drawingml/2006/main" xmlns:r="http://schemas.openxmlformats.org/officeDocument/2006/relationships" xmlns:p="http://schemas.openxmlformats.org/presentationml/2006/main">
-  <p:cSld>
+  <p:cSld name="Default">
     <p:bg>
       <p:bgPr>
         <a:solidFill>
@@ -1012,10 +901,9 @@
   </p:cSld>
   <p:clrMap bg1="lt1" tx1="dk1" bg2="lt2" tx2="dk2" accent1="accent1" accent2="accent2" accent3="accent3" accent4="accent4" accent5="accent5" accent6="accent6" hlink="hlink" folHlink="folHlink"/>
   <p:sldLayoutIdLst>
-    <p:sldLayoutId id="2147483650" r:id="R766bdfa4cb8d49e4"/>
-    <p:sldLayoutId id="2147483651" r:id="R69b8dc882fbb43c0"/>
-    <p:sldLayoutId id="2147483652" r:id="R070cc96cc2f84521"/>
-    <p:sldLayoutId id="2147483653" r:id="Rf94f901102874710"/>
+    <p:sldLayoutId id="2147483650" r:id="R0a643ba796b34f2d"/>
+    <p:sldLayoutId id="2147483651" r:id="R478e205a42a64618"/>
+    <p:sldLayoutId id="2147483652" r:id="R68b529be597b40bd"/>
   </p:sldLayoutIdLst>
   <p:txStyles>
     <p:titleStyle>
@@ -1705,7 +1593,7 @@
     <c:plotVisOnly val="1"/>
     <c:dispBlanksAs val="gap"/>
   </c:chart>
-  <c:externalData xmlns:r="http://schemas.openxmlformats.org/officeDocument/2006/relationships" r:id="R602cf8c208b24a45">
+  <c:externalData xmlns:r="http://schemas.openxmlformats.org/officeDocument/2006/relationships" r:id="R6c583b100cde4ccf">
     <c:autoUpdate val="0"/>
   </c:externalData>
 </c:chartSpace>
@@ -1913,7 +1801,7 @@
             </a:lvl1pPr>
           </a:lstStyle>
           <a:p xmlns:a="http://schemas.openxmlformats.org/drawingml/2006/main">
-            <a:fld id="{45A8F0E6-0376-44F2-84A7-442079B99F60}" type="slidenum">
+            <a:fld id="{C20A36E9-3485-421E-9543-C97008690941}" type="slidenum">
               <a:rPr lang="en-US"/>
               <a:t>‹#›</a:t>
             </a:fld>
@@ -4209,7 +4097,7 @@
             </a:lvl1pPr>
           </a:lstStyle>
           <a:p xmlns:a="http://schemas.openxmlformats.org/drawingml/2006/main">
-            <a:fld id="{381B24F7-CF79-45E1-8CC1-FFD784B7BA5D}" type="slidenum">
+            <a:fld id="{AC5A1E1C-B78F-4B5E-98DD-80D6E7CE0055}" type="slidenum">
               <a:rPr lang="en-US"/>
               <a:t>‹#›</a:t>
             </a:fld>
@@ -4277,7 +4165,7 @@
         </p:xfrm>
         <a:graphic>
           <a:graphicData uri="http://schemas.openxmlformats.org/drawingml/2006/chart">
-            <c:chart xmlns:r="http://schemas.openxmlformats.org/officeDocument/2006/relationships" xmlns:c="http://schemas.openxmlformats.org/drawingml/2006/chart" r:id="Rac31da43d2964f64"/>
+            <c:chart xmlns:r="http://schemas.openxmlformats.org/officeDocument/2006/relationships" xmlns:c="http://schemas.openxmlformats.org/drawingml/2006/chart" r:id="R51b75e527c85448e"/>
           </a:graphicData>
         </a:graphic>
       </p:graphicFrame>
@@ -4558,7 +4446,7 @@
             </a:lvl1pPr>
           </a:lstStyle>
           <a:p xmlns:a="http://schemas.openxmlformats.org/drawingml/2006/main">
-            <a:fld id="{381B24F7-CF79-45E1-8CC1-FFD784B7BA5D}" type="slidenum">
+            <a:fld id="{AC5A1E1C-B78F-4B5E-98DD-80D6E7CE0055}" type="slidenum">
               <a:rPr lang="en-US"/>
               <a:t>‹#›</a:t>
             </a:fld>
@@ -5155,7 +5043,7 @@
             </a:lvl1pPr>
           </a:lstStyle>
           <a:p xmlns:a="http://schemas.openxmlformats.org/drawingml/2006/main">
-            <a:fld id="{381B24F7-CF79-45E1-8CC1-FFD784B7BA5D}" type="slidenum">
+            <a:fld id="{AC5A1E1C-B78F-4B5E-98DD-80D6E7CE0055}" type="slidenum">
               <a:rPr lang="en-US"/>
               <a:t>‹#›</a:t>
             </a:fld>
@@ -5686,7 +5574,7 @@
             </a:lvl1pPr>
           </a:lstStyle>
           <a:p xmlns:a="http://schemas.openxmlformats.org/drawingml/2006/main">
-            <a:fld id="{381B24F7-CF79-45E1-8CC1-FFD784B7BA5D}" type="slidenum">
+            <a:fld id="{AC5A1E1C-B78F-4B5E-98DD-80D6E7CE0055}" type="slidenum">
               <a:rPr lang="en-US"/>
               <a:t>‹#›</a:t>
             </a:fld>
@@ -5700,7 +5588,7 @@
 </file>
 
 <file path=ppt/theme/theme1.xml><?xml version="1.0" encoding="utf-8"?>
-<a:theme xmlns:thm15="http://schemas.microsoft.com/office/thememl/2012/main" xmlns:a="http://schemas.openxmlformats.org/drawingml/2006/main" name="Office Theme">
+<a:theme xmlns:thm15="http://schemas.microsoft.com/office/thememl/2012/main" xmlns:a="http://schemas.openxmlformats.org/drawingml/2006/main" name="Default">
   <a:themeElements>
     <a:clrScheme name="Office">
       <a:dk1>

--- a/src/Pintura.Tests/fixtures/pptx/default-theme.pptx
+++ b/src/Pintura.Tests/fixtures/pptx/default-theme.pptx
@@ -5,12 +5,12 @@
     <p:sldMasterId id="2147483648" r:id="rId1"/>
   </p:sldMasterIdLst>
   <p:sldIdLst>
-    <p:sldId id="257" r:id="Rede929e31373429e"/>
-    <p:sldId id="258" r:id="R7609ee0fda3543b9"/>
-    <p:sldId id="259" r:id="R9b03bb61f13d4eca"/>
-    <p:sldId id="260" r:id="Rff1f3bd5091a4faa"/>
-    <p:sldId id="261" r:id="R4fcec321fc4d4473"/>
-    <p:sldId id="262" r:id="Rc47144963c8f4b55"/>
+    <p:sldId id="257" r:id="R6f2b14a50233405e"/>
+    <p:sldId id="258" r:id="R1a74081968284f03"/>
+    <p:sldId id="259" r:id="R15120315ce104d6b"/>
+    <p:sldId id="260" r:id="R198d32a3b8554258"/>
+    <p:sldId id="261" r:id="Ra9d6da514b7a4d54"/>
+    <p:sldId id="262" r:id="Rc772f67106e046d4"/>
   </p:sldIdLst>
   <p:sldSz cx="12192000" cy="6858000"/>
   <p:notesSz cx="6858000" cy="9144000"/>
@@ -112,12 +112,12 @@
   <p:extLst>
     <p:ext uri="{521415D9-36F7-43E2-AB2F-B90AF26B5E84}">
       <p14:sectionLst xmlns:p14="http://schemas.microsoft.com/office/powerpoint/2010/main">
-        <p14:section name="Default Section" id="{1FF75EB3-ABB8-4CD1-8A32-0256EBB70A98}">
+        <p14:section name="Default Section" id="{55B12989-43EE-4390-9368-9C7289A90573}">
           <p14:sldIdLst>
             <p14:sldId id="257"/>
           </p14:sldIdLst>
         </p14:section>
-        <p14:section name="Full-year results" id="{0A83E073-CFC9-44CC-9410-B8AED0B1D8BD}">
+        <p14:section name="Full-year results" id="{0CB91B10-E7B7-499B-9E12-956B584BCF0C}">
           <p14:sldIdLst>
             <p14:sldId id="258"/>
             <p14:sldId id="259"/>
@@ -125,7 +125,7 @@
             <p14:sldId id="261"/>
           </p14:sldIdLst>
         </p14:section>
-        <p14:section name="First half of 2026" id="{C9E2DDCA-2852-425A-91A5-4E3F79BA8FA0}">
+        <p14:section name="First half of 2026" id="{B63BF00F-C7C4-475D-ACF1-BD16B1077771}">
           <p14:sldIdLst>
             <p14:sldId id="262"/>
           </p14:sldIdLst>
@@ -232,7 +232,7 @@
             </a:lvl1pPr>
           </a:lstStyle>
           <a:p>
-            <a:fld id="{AC5A1E1C-B78F-4B5E-98DD-80D6E7CE0055}" type="slidenum">
+            <a:fld id="{A7EA44E2-2FED-4BAE-8B65-428F44AFA99C}" type="slidenum">
               <a:rPr lang="en-US"/>
               <a:t>‹#›</a:t>
             </a:fld>
@@ -448,7 +448,7 @@
             </a:lvl1pPr>
           </a:lstStyle>
           <a:p>
-            <a:fld id="{C20A36E9-3485-421E-9543-C97008690941}" type="slidenum">
+            <a:fld id="{DB34F352-9F73-4503-A76A-E540AC49663A}" type="slidenum">
               <a:rPr lang="en-US"/>
               <a:t>‹#›</a:t>
             </a:fld>
@@ -901,9 +901,9 @@
   </p:cSld>
   <p:clrMap bg1="lt1" tx1="dk1" bg2="lt2" tx2="dk2" accent1="accent1" accent2="accent2" accent3="accent3" accent4="accent4" accent5="accent5" accent6="accent6" hlink="hlink" folHlink="folHlink"/>
   <p:sldLayoutIdLst>
-    <p:sldLayoutId id="2147483650" r:id="R0a643ba796b34f2d"/>
-    <p:sldLayoutId id="2147483651" r:id="R478e205a42a64618"/>
-    <p:sldLayoutId id="2147483652" r:id="R68b529be597b40bd"/>
+    <p:sldLayoutId id="2147483650" r:id="R1a37092aafe8443c"/>
+    <p:sldLayoutId id="2147483651" r:id="R143323e99d9c4b16"/>
+    <p:sldLayoutId id="2147483652" r:id="R6b1e10f89e9141fc"/>
   </p:sldLayoutIdLst>
   <p:txStyles>
     <p:titleStyle>
@@ -1593,7 +1593,7 @@
     <c:plotVisOnly val="1"/>
     <c:dispBlanksAs val="gap"/>
   </c:chart>
-  <c:externalData xmlns:r="http://schemas.openxmlformats.org/officeDocument/2006/relationships" r:id="R6c583b100cde4ccf">
+  <c:externalData xmlns:r="http://schemas.openxmlformats.org/officeDocument/2006/relationships" r:id="Rb8fdea9def7d43d4">
     <c:autoUpdate val="0"/>
   </c:externalData>
 </c:chartSpace>
@@ -1801,7 +1801,7 @@
             </a:lvl1pPr>
           </a:lstStyle>
           <a:p xmlns:a="http://schemas.openxmlformats.org/drawingml/2006/main">
-            <a:fld id="{C20A36E9-3485-421E-9543-C97008690941}" type="slidenum">
+            <a:fld id="{DB34F352-9F73-4503-A76A-E540AC49663A}" type="slidenum">
               <a:rPr lang="en-US"/>
               <a:t>‹#›</a:t>
             </a:fld>
@@ -4097,7 +4097,7 @@
             </a:lvl1pPr>
           </a:lstStyle>
           <a:p xmlns:a="http://schemas.openxmlformats.org/drawingml/2006/main">
-            <a:fld id="{AC5A1E1C-B78F-4B5E-98DD-80D6E7CE0055}" type="slidenum">
+            <a:fld id="{A7EA44E2-2FED-4BAE-8B65-428F44AFA99C}" type="slidenum">
               <a:rPr lang="en-US"/>
               <a:t>‹#›</a:t>
             </a:fld>
@@ -4165,7 +4165,7 @@
         </p:xfrm>
         <a:graphic>
           <a:graphicData uri="http://schemas.openxmlformats.org/drawingml/2006/chart">
-            <c:chart xmlns:r="http://schemas.openxmlformats.org/officeDocument/2006/relationships" xmlns:c="http://schemas.openxmlformats.org/drawingml/2006/chart" r:id="R51b75e527c85448e"/>
+            <c:chart xmlns:r="http://schemas.openxmlformats.org/officeDocument/2006/relationships" xmlns:c="http://schemas.openxmlformats.org/drawingml/2006/chart" r:id="R43362ae299084175"/>
           </a:graphicData>
         </a:graphic>
       </p:graphicFrame>
@@ -4211,7 +4211,7 @@
                 </a:solidFill>
                 <a:latin typeface="+mn-lt"/>
               </a:rPr>
-              <a:t>Adjusted EBITDA of $6.6B in 2025, from $3.8B in 2023</a:t>
+              <a:t>Adjusted EBITDA of $6.6B in 2025, up from $3.8B in 2023</a:t>
             </a:r>
             <a:endParaRPr sz="1800" b="1" i="0" u="none">
               <a:solidFill>
@@ -4446,7 +4446,7 @@
             </a:lvl1pPr>
           </a:lstStyle>
           <a:p xmlns:a="http://schemas.openxmlformats.org/drawingml/2006/main">
-            <a:fld id="{AC5A1E1C-B78F-4B5E-98DD-80D6E7CE0055}" type="slidenum">
+            <a:fld id="{A7EA44E2-2FED-4BAE-8B65-428F44AFA99C}" type="slidenum">
               <a:rPr lang="en-US"/>
               <a:t>‹#›</a:t>
             </a:fld>
@@ -5043,7 +5043,7 @@
             </a:lvl1pPr>
           </a:lstStyle>
           <a:p xmlns:a="http://schemas.openxmlformats.org/drawingml/2006/main">
-            <a:fld id="{AC5A1E1C-B78F-4B5E-98DD-80D6E7CE0055}" type="slidenum">
+            <a:fld id="{A7EA44E2-2FED-4BAE-8B65-428F44AFA99C}" type="slidenum">
               <a:rPr lang="en-US"/>
               <a:t>‹#›</a:t>
             </a:fld>
@@ -5574,7 +5574,7 @@
             </a:lvl1pPr>
           </a:lstStyle>
           <a:p xmlns:a="http://schemas.openxmlformats.org/drawingml/2006/main">
-            <a:fld id="{AC5A1E1C-B78F-4B5E-98DD-80D6E7CE0055}" type="slidenum">
+            <a:fld id="{A7EA44E2-2FED-4BAE-8B65-428F44AFA99C}" type="slidenum">
               <a:rPr lang="en-US"/>
               <a:t>‹#›</a:t>
             </a:fld>
